--- a/decks/geog-weather-hazards/geog-weather-hazards_ch6_somerset-floods.pptx
+++ b/decks/geog-weather-hazards/geog-weather-hazards_ch6_somerset-floods.pptx
@@ -126,30 +126,30 @@
   <p:extLst>
     <p:ext uri="{521415D9-36F7-43E2-AB2F-B90AF26B5E84}">
       <p14:sectionLst xmlns:p14="http://schemas.microsoft.com/office/powerpoint/2010/main">
-        <p14:section name="Opening" id="{550606a6-b7df-3e65-7a9f-0af2026a15a3}">
+        <p14:section name="Opening" id="{1022fd00-cbf8-cd33-dd4a-e48f0d162879}">
           <p14:sldIdLst>
             <p14:sldId id="256"/>
           </p14:sldIdLst>
         </p14:section>
-        <p14:section name="Gate" id="{551c5c3b-7724-08e7-5e4d-0e724452220b}">
+        <p14:section name="Gate" id="{54794510-f85f-646e-c4e0-394c9f793dd5}">
           <p14:sldIdLst>
             <p14:sldId id="257"/>
             <p14:sldId id="258"/>
           </p14:sldIdLst>
         </p14:section>
-        <p14:section name="Pre-teach" id="{eddc89b0-04ea-b0ca-95c6-bb871835fe23}">
+        <p14:section name="Pre-teach" id="{b88dd011-9c87-a363-bad2-12209d54e055}">
           <p14:sldIdLst>
             <p14:sldId id="259"/>
             <p14:sldId id="260"/>
           </p14:sldIdLst>
         </p14:section>
-        <p14:section name="Read-along" id="{bd851051-2aec-d2d6-150d-bd825419fe00}">
+        <p14:section name="Read-along" id="{7fe68a2b-2ba4-c68f-c713-a37e92aa40f8}">
           <p14:sldIdLst>
             <p14:sldId id="261"/>
             <p14:sldId id="262"/>
           </p14:sldIdLst>
         </p14:section>
-        <p14:section name="Teach" id="{9ccb3140-793a-737e-f991-b6f78173a512}">
+        <p14:section name="Teach" id="{b802e348-8ada-0de8-8b5c-dd795a1a3348}">
           <p14:sldIdLst>
             <p14:sldId id="263"/>
             <p14:sldId id="264"/>
@@ -158,7 +158,7 @@
             <p14:sldId id="267"/>
           </p14:sldIdLst>
         </p14:section>
-        <p14:section name="Routes" id="{8418ef33-a8a0-0898-0583-04a1b0c7d5cd}">
+        <p14:section name="Routes" id="{492bbe1f-0fb4-084d-2b66-4955dc73de8a}">
           <p14:sldIdLst>
             <p14:sldId id="268"/>
             <p14:sldId id="269"/>
@@ -166,12 +166,12 @@
             <p14:sldId id="271"/>
           </p14:sldIdLst>
         </p14:section>
-        <p14:section name="Close" id="{4a6d0e0c-973c-d73e-adc1-8a7cb4a2ee07}">
+        <p14:section name="Close" id="{df37c465-aba5-f422-6158-521806596eee}">
           <p14:sldIdLst>
             <p14:sldId id="272"/>
           </p14:sldIdLst>
         </p14:section>
-        <p14:section name="Answers" id="{2d80d761-fc9a-99a1-2f5b-40b42fb92f82}">
+        <p14:section name="Answers" id="{9a47ae7f-8bad-0b8a-f8a4-575d30dbcaec}">
           <p14:sldIdLst>
             <p14:sldId id="273"/>
             <p14:sldId id="274"/>
@@ -674,8 +674,8 @@
             <a:r>
               <a:rPr lang="en-US" dirty="0"/>
               <a:t>Teach — What caused the floods?. Say it in your own words, then check understanding with a quick question: ask a pupil from the pre-teach group first, since they met these words and ideas before the lesson. Pupils try to recall before you re-explain.
-The floods of December 2013 and January 2014 had both physical and human causes. The weather came first. January 2014 was the wettest January since records began in 1910. A succession of depressions, areas of low pressure driven across the Atlantic Ocean by the prevailing winds, brought wet weather lasting several weeks. About 350 mm of rain fell in January and February, roughly 100 mm above the average for those two months.
-The sea made it worse. High tides and storm surges swept water up the rivers from the Bristol Channel. That stopped the fresh water from the rivers reaching the sea, so the rivers backed up and burst their banks. The human cause was neglect: the rivers had not been dredged for at least 20 years, so their channels had become clogged with sediment and could hold far less water than before.
+The floods of December 2013 and January 2014 had both physical and human causes. The weather came first. January 2014 was the wettest January in the record, which begins in 1910. One depression followed another, each an area of low pressure carried in off the Atlantic by the prevailing winds, and the wet weather went on for weeks. About 350 mm of rain fell in January and February, roughly 100 mm above the average for those two months.
+The sea made it worse. Sea water was pushed up the rivers from the Bristol Channel by high tides and storm surges. That stopped the fresh water from the rivers reaching the sea, so the rivers backed up and burst their banks. The human cause was neglect: the rivers had not been dredged for at least 20 years, so their channels had become clogged with sediment and could hold far less water than before.
 So the causes link together: record rainfall on a low, flat basin, rivers whose capacity had shrunk because they were not dredged, and tides blocking the way out. Any one of them would have caused problems; all three together caused the worst flooding the Levels had seen.
 Worked example — model it step by step, thinking aloud: About 350 mm of rain fell on the Somerset Levels in January and February 2014, about 100 mm above average. What is the average rainfall for January and February? (1) Above average means the actual total was bigger than the average by 100 mm. (2) Average = actual − the extra: 350 − 100 = 250 mm. (3) Check the sense: 350 mm is 350 ÷ 250 = 1.4 times the average, that is, 40 per cent more rain than normal. The wettest January on record should be well above average, and it is. Answer: 250 mm.
 Tip: Causes come in two kinds: physical (rainfall, tides, low land) and human (no dredging, building on the floodplain). Give both.</a:t>
@@ -768,7 +768,7 @@
               <a:rPr lang="en-US" dirty="0"/>
               <a:t>Teach — Impacts: social, economic and environmental. Say it in your own words, then check understanding with a quick question: ask a pupil from the pre-teach group first, since they met these words and ideas before the lesson. Pupils try to recall before you re-explain.
 Social impacts are the effects on people's lives. Over 600 houses were flooded. Residents were evacuated to temporary accommodation for several months. Villages such as Moorland and Muchelney were cut off, local roads were under water and many people had their power supplies cut off. Economic impacts are the effects on money, jobs and property. The estimated cost of the flood damage was over £10 million. Sixteen farms were evacuated and over 14 000 hectares of agricultural land were under water for three to four weeks, ruining crops and grazing. The Bristol to Taunton railway line was closed at Bridgwater, cutting an important transport link.
-Environmental impacts are the effects on land, water and wildlife. The flood water was heavily contaminated with sewage and with other pollutants such as oil and chemicals. A huge amount of debris had to be cleared. Stagnant water that had collected for months had to be treated before it could be pumped back into the rivers, because water that has stood still for weeks is low in oxygen and would harm river life.
+Environmental impacts are the effects on land, water and wildlife. The flood water was heavily contaminated with sewage and with other pollutants, oil and chemicals among them. Mountains of debris had to be cleared. Stagnant water that had collected for months had to be treated before it could be pumped back into the rivers, because water that has stood still for weeks is low in oxygen and would harm river life.
 Many impacts belong in more than one column: a flooded farm is economic for the farmer and social for the family that lives there. In a nine-mark answer that asks whether the economic effects were more significant than the social ones, make a judgement and support it with comparative language: whereas, on the other hand, more significant because.
 Tip: Social is people, economic is money and property, environmental is land, water and wildlife. Put at least one dated fact in each column.</a:t>
             </a:r>
@@ -2257,7 +2257,7 @@
             <a:r>
               <a:rPr lang="en-US" dirty="0"/>
               <a:t>Teach — Where are the Somerset Levels?. Say it in your own words, then check understanding with a quick question: ask a pupil from the pre-teach group first, since they met these words and ideas before the lesson. Pupils try to recall before you re-explain.
-Somerset is a county in south-west England. The Somerset Levels and the Somerset Moors form an extensive area of low-lying farmland and wetland, with the Bristol Channel and the Quantock Hills to the west and the Mendip Hills to the north. Several rivers drain the area, most notably the Tone and the Parrett, which flow north to the Severn Estuary through the town of Bridgwater.
+Somerset is a county in south-west England. The Somerset Levels and Moors are a wide stretch of low, flat farmland and wetland, with the Bristol Channel and the Quantock Hills to the west and the Mendip Hills to the north. Several rivers drain the area, most notably the Tone and the Parrett, which flow north to the Severn Estuary through the town of Bridgwater.
 Flooding has happened naturally here for centuries: the Levels are a flat basin only a little above sea level, and in winter the rivers have always spilled across them. What has changed is that the area has been developed for farming and for settlement, so many more people and properties are now at risk from an extreme flood.
 Tip: Locate means place it: south-west England, Somerset, between the Quantock and Mendip Hills, drained by the Tone and Parrett to the Severn Estuary.</a:t>
             </a:r>
@@ -2348,8 +2348,8 @@
             <a:r>
               <a:rPr lang="en-US" dirty="0"/>
               <a:t>Teach — What caused the floods?. Say it in your own words, then check understanding with a quick question: ask a pupil from the pre-teach group first, since they met these words and ideas before the lesson. Pupils try to recall before you re-explain.
-The floods of December 2013 and January 2014 had both physical and human causes. The weather came first. January 2014 was the wettest January since records began in 1910. A succession of depressions, areas of low pressure driven across the Atlantic Ocean by the prevailing winds, brought wet weather lasting several weeks. About 350 mm of rain fell in January and February, roughly 100 mm above the average for those two months.
-The sea made it worse. High tides and storm surges swept water up the rivers from the Bristol Channel. That stopped the fresh water from the rivers reaching the sea, so the rivers backed up and burst their banks. The human cause was neglect: the rivers had not been dredged for at least 20 years, so their channels had become clogged with sediment and could hold far less water than before.
+The floods of December 2013 and January 2014 had both physical and human causes. The weather came first. January 2014 was the wettest January in the record, which begins in 1910. One depression followed another, each an area of low pressure carried in off the Atlantic by the prevailing winds, and the wet weather went on for weeks. About 350 mm of rain fell in January and February, roughly 100 mm above the average for those two months.
+The sea made it worse. Sea water was pushed up the rivers from the Bristol Channel by high tides and storm surges. That stopped the fresh water from the rivers reaching the sea, so the rivers backed up and burst their banks. The human cause was neglect: the rivers had not been dredged for at least 20 years, so their channels had become clogged with sediment and could hold far less water than before.
 So the causes link together: record rainfall on a low, flat basin, rivers whose capacity had shrunk because they were not dredged, and tides blocking the way out. Any one of them would have caused problems; all three together caused the worst flooding the Levels had seen.
 Worked example — model it step by step, thinking aloud: About 350 mm of rain fell on the Somerset Levels in January and February 2014, about 100 mm above average. What is the average rainfall for January and February? (1) Above average means the actual total was bigger than the average by 100 mm. (2) Average = actual − the extra: 350 − 100 = 250 mm. (3) Check the sense: 350 mm is 350 ÷ 250 = 1.4 times the average, that is, 40 per cent more rain than normal. The wettest January on record should be well above average, and it is. Answer: 250 mm.
 Tip: Causes come in two kinds: physical (rainfall, tides, low land) and human (no dredging, building on the floodplain). Give both.</a:t>
@@ -16669,7 +16669,7 @@
                 <a:ea typeface="Calibri" pitchFamily="34" charset="-122"/>
                 <a:cs typeface="Calibri" pitchFamily="34" charset="-120"/>
               </a:rPr>
-              <a:t>Somerset is a county in south-west England. The Somerset Levels and the Somerset Moors form an extensive area of low-lying farmland and wetland, with the Bristol Channel and the Quantock Hills to the west and the Mendip Hills to the north.</a:t>
+              <a:t>Somerset is a county in south-west England. The Somerset Levels and Moors are a wide stretch of low, flat farmland and wetland, with the Bristol Channel and the Quantock Hills to the west and the Mendip Hills to the north.</a:t>
             </a:r>
             <a:endParaRPr lang="en-US" sz="2200" dirty="0"/>
           </a:p>
@@ -17367,7 +17367,7 @@
                 <a:ea typeface="Calibri" pitchFamily="34" charset="-122"/>
                 <a:cs typeface="Calibri" pitchFamily="34" charset="-120"/>
               </a:rPr>
-              <a:t>The sea made it worse. High tides and storm surges swept water up the rivers from the Bristol Channel.</a:t>
+              <a:t>The sea made it worse. Sea water was pushed up the rivers from the Bristol Channel by high tides and storm surges.</a:t>
             </a:r>
             <a:endParaRPr lang="en-US" sz="2000" dirty="0"/>
           </a:p>
